--- a/docs/source/ip_cores/uz_ssi_interface/ssi_figures.pptx
+++ b/docs/source/ip_cores/uz_ssi_interface/ssi_figures.pptx
@@ -6,7 +6,7 @@
   </p:sldMasterIdLst>
   <p:sldIdLst>
     <p:sldId id="256" r:id="rId2"/>
-    <p:sldId id="257" r:id="rId3"/>
+    <p:sldId id="258" r:id="rId3"/>
   </p:sldIdLst>
   <p:sldSz cx="12192000" cy="6858000"/>
   <p:notesSz cx="6858000" cy="9144000"/>
@@ -105,6 +105,11 @@
       </a:defRPr>
     </a:lvl9pPr>
   </p:defaultTextStyle>
+  <p:extLst>
+    <p:ext uri="{EFAFB233-063F-42B5-8137-9DF3F51BA10A}">
+      <p15:sldGuideLst xmlns:p15="http://schemas.microsoft.com/office/powerpoint/2012/main"/>
+    </p:ext>
+  </p:extLst>
 </p:presentation>
 </file>
 
@@ -255,7 +260,7 @@
           <a:p>
             <a:fld id="{7E2356D3-E30D-44B7-AFFE-AEB9BA27F901}" type="datetimeFigureOut">
               <a:rPr lang="de-DE" smtClean="0"/>
-              <a:t>27.04.2026</a:t>
+              <a:t>08.05.2026</a:t>
             </a:fld>
             <a:endParaRPr lang="de-DE"/>
           </a:p>
@@ -453,7 +458,7 @@
           <a:p>
             <a:fld id="{7E2356D3-E30D-44B7-AFFE-AEB9BA27F901}" type="datetimeFigureOut">
               <a:rPr lang="de-DE" smtClean="0"/>
-              <a:t>27.04.2026</a:t>
+              <a:t>08.05.2026</a:t>
             </a:fld>
             <a:endParaRPr lang="de-DE"/>
           </a:p>
@@ -661,7 +666,7 @@
           <a:p>
             <a:fld id="{7E2356D3-E30D-44B7-AFFE-AEB9BA27F901}" type="datetimeFigureOut">
               <a:rPr lang="de-DE" smtClean="0"/>
-              <a:t>27.04.2026</a:t>
+              <a:t>08.05.2026</a:t>
             </a:fld>
             <a:endParaRPr lang="de-DE"/>
           </a:p>
@@ -859,7 +864,7 @@
           <a:p>
             <a:fld id="{7E2356D3-E30D-44B7-AFFE-AEB9BA27F901}" type="datetimeFigureOut">
               <a:rPr lang="de-DE" smtClean="0"/>
-              <a:t>27.04.2026</a:t>
+              <a:t>08.05.2026</a:t>
             </a:fld>
             <a:endParaRPr lang="de-DE"/>
           </a:p>
@@ -1134,7 +1139,7 @@
           <a:p>
             <a:fld id="{7E2356D3-E30D-44B7-AFFE-AEB9BA27F901}" type="datetimeFigureOut">
               <a:rPr lang="de-DE" smtClean="0"/>
-              <a:t>27.04.2026</a:t>
+              <a:t>08.05.2026</a:t>
             </a:fld>
             <a:endParaRPr lang="de-DE"/>
           </a:p>
@@ -1399,7 +1404,7 @@
           <a:p>
             <a:fld id="{7E2356D3-E30D-44B7-AFFE-AEB9BA27F901}" type="datetimeFigureOut">
               <a:rPr lang="de-DE" smtClean="0"/>
-              <a:t>27.04.2026</a:t>
+              <a:t>08.05.2026</a:t>
             </a:fld>
             <a:endParaRPr lang="de-DE"/>
           </a:p>
@@ -1811,7 +1816,7 @@
           <a:p>
             <a:fld id="{7E2356D3-E30D-44B7-AFFE-AEB9BA27F901}" type="datetimeFigureOut">
               <a:rPr lang="de-DE" smtClean="0"/>
-              <a:t>27.04.2026</a:t>
+              <a:t>08.05.2026</a:t>
             </a:fld>
             <a:endParaRPr lang="de-DE"/>
           </a:p>
@@ -1952,7 +1957,7 @@
           <a:p>
             <a:fld id="{7E2356D3-E30D-44B7-AFFE-AEB9BA27F901}" type="datetimeFigureOut">
               <a:rPr lang="de-DE" smtClean="0"/>
-              <a:t>27.04.2026</a:t>
+              <a:t>08.05.2026</a:t>
             </a:fld>
             <a:endParaRPr lang="de-DE"/>
           </a:p>
@@ -2065,7 +2070,7 @@
           <a:p>
             <a:fld id="{7E2356D3-E30D-44B7-AFFE-AEB9BA27F901}" type="datetimeFigureOut">
               <a:rPr lang="de-DE" smtClean="0"/>
-              <a:t>27.04.2026</a:t>
+              <a:t>08.05.2026</a:t>
             </a:fld>
             <a:endParaRPr lang="de-DE"/>
           </a:p>
@@ -2376,7 +2381,7 @@
           <a:p>
             <a:fld id="{7E2356D3-E30D-44B7-AFFE-AEB9BA27F901}" type="datetimeFigureOut">
               <a:rPr lang="de-DE" smtClean="0"/>
-              <a:t>27.04.2026</a:t>
+              <a:t>08.05.2026</a:t>
             </a:fld>
             <a:endParaRPr lang="de-DE"/>
           </a:p>
@@ -2664,7 +2669,7 @@
           <a:p>
             <a:fld id="{7E2356D3-E30D-44B7-AFFE-AEB9BA27F901}" type="datetimeFigureOut">
               <a:rPr lang="de-DE" smtClean="0"/>
-              <a:t>27.04.2026</a:t>
+              <a:t>08.05.2026</a:t>
             </a:fld>
             <a:endParaRPr lang="de-DE"/>
           </a:p>
@@ -2905,7 +2910,7 @@
           <a:p>
             <a:fld id="{7E2356D3-E30D-44B7-AFFE-AEB9BA27F901}" type="datetimeFigureOut">
               <a:rPr lang="de-DE" smtClean="0"/>
-              <a:t>27.04.2026</a:t>
+              <a:t>08.05.2026</a:t>
             </a:fld>
             <a:endParaRPr lang="de-DE"/>
           </a:p>
@@ -3909,7 +3914,7 @@
         <p:cNvPr id="1" name="">
           <a:extLst>
             <a:ext uri="{FF2B5EF4-FFF2-40B4-BE49-F238E27FC236}">
-              <a16:creationId xmlns:a16="http://schemas.microsoft.com/office/drawing/2014/main" id="{6D55B969-F351-34D6-B7E4-E7E4372B98C0}"/>
+              <a16:creationId xmlns:a16="http://schemas.microsoft.com/office/drawing/2014/main" id="{AA03560E-5EF3-8CEE-5D8A-435BDDFA52C3}"/>
             </a:ext>
           </a:extLst>
         </p:cNvPr>
@@ -3926,10 +3931,10 @@
       </p:grpSpPr>
       <p:pic>
         <p:nvPicPr>
-          <p:cNvPr id="8" name="Grafik 7">
-            <a:extLst>
-              <a:ext uri="{FF2B5EF4-FFF2-40B4-BE49-F238E27FC236}">
-                <a16:creationId xmlns:a16="http://schemas.microsoft.com/office/drawing/2014/main" id="{094599B2-F85C-244B-AAB3-46B3246B2475}"/>
+          <p:cNvPr id="3" name="Grafik 2">
+            <a:extLst>
+              <a:ext uri="{FF2B5EF4-FFF2-40B4-BE49-F238E27FC236}">
+                <a16:creationId xmlns:a16="http://schemas.microsoft.com/office/drawing/2014/main" id="{49EDBB39-140D-E2E6-75AC-7CFDAB41EA19}"/>
               </a:ext>
             </a:extLst>
           </p:cNvPr>
@@ -3946,8 +3951,8 @@
         </p:blipFill>
         <p:spPr>
           <a:xfrm>
-            <a:off x="8531351" y="1917250"/>
-            <a:ext cx="1682836" cy="273064"/>
+            <a:off x="3071412" y="3117566"/>
+            <a:ext cx="1263715" cy="311166"/>
           </a:xfrm>
           <a:prstGeom prst="rect">
             <a:avLst/>
@@ -3956,10 +3961,10 @@
       </p:pic>
       <p:pic>
         <p:nvPicPr>
-          <p:cNvPr id="5" name="Grafik 4">
-            <a:extLst>
-              <a:ext uri="{FF2B5EF4-FFF2-40B4-BE49-F238E27FC236}">
-                <a16:creationId xmlns:a16="http://schemas.microsoft.com/office/drawing/2014/main" id="{45C0BBD4-FF20-2D99-14EC-75E6A3C4A5F0}"/>
+          <p:cNvPr id="9" name="Grafik 8">
+            <a:extLst>
+              <a:ext uri="{FF2B5EF4-FFF2-40B4-BE49-F238E27FC236}">
+                <a16:creationId xmlns:a16="http://schemas.microsoft.com/office/drawing/2014/main" id="{5195DC44-18FF-C6EF-89AC-8C515AA4416B}"/>
               </a:ext>
             </a:extLst>
           </p:cNvPr>
@@ -3976,38 +3981,8 @@
         </p:blipFill>
         <p:spPr>
           <a:xfrm>
-            <a:off x="3641599" y="1320691"/>
-            <a:ext cx="4908802" cy="4216617"/>
-          </a:xfrm>
-          <a:prstGeom prst="rect">
-            <a:avLst/>
-          </a:prstGeom>
-        </p:spPr>
-      </p:pic>
-      <p:pic>
-        <p:nvPicPr>
-          <p:cNvPr id="3" name="Grafik 2">
-            <a:extLst>
-              <a:ext uri="{FF2B5EF4-FFF2-40B4-BE49-F238E27FC236}">
-                <a16:creationId xmlns:a16="http://schemas.microsoft.com/office/drawing/2014/main" id="{94B807BA-BBD7-BC76-D0E4-9C997A7CBBC5}"/>
-              </a:ext>
-            </a:extLst>
-          </p:cNvPr>
-          <p:cNvPicPr>
-            <a:picLocks noChangeAspect="1"/>
-          </p:cNvPicPr>
-          <p:nvPr/>
-        </p:nvPicPr>
-        <p:blipFill>
-          <a:blip r:embed="rId4"/>
-          <a:stretch>
-            <a:fillRect/>
-          </a:stretch>
-        </p:blipFill>
-        <p:spPr>
-          <a:xfrm>
-            <a:off x="2428684" y="3276591"/>
-            <a:ext cx="1263715" cy="311166"/>
+            <a:off x="2889037" y="3362472"/>
+            <a:ext cx="1286458" cy="315182"/>
           </a:xfrm>
           <a:prstGeom prst="rect">
             <a:avLst/>
@@ -4019,7 +3994,7 @@
           <p:cNvPr id="6" name="Grafik 5">
             <a:extLst>
               <a:ext uri="{FF2B5EF4-FFF2-40B4-BE49-F238E27FC236}">
-                <a16:creationId xmlns:a16="http://schemas.microsoft.com/office/drawing/2014/main" id="{097B7A76-CA65-F599-C6B3-0E873619BFCC}"/>
+                <a16:creationId xmlns:a16="http://schemas.microsoft.com/office/drawing/2014/main" id="{8A3522D2-CBA3-ED1B-8633-52DD5F5A2FED}"/>
               </a:ext>
             </a:extLst>
           </p:cNvPr>
@@ -4029,7 +4004,7 @@
           <p:nvPr/>
         </p:nvPicPr>
         <p:blipFill>
-          <a:blip r:embed="rId5"/>
+          <a:blip r:embed="rId4"/>
           <a:srcRect b="25861"/>
           <a:stretch>
             <a:fillRect/>
@@ -4037,7 +4012,7 @@
         </p:blipFill>
         <p:spPr>
           <a:xfrm>
-            <a:off x="8417338" y="1663237"/>
+            <a:off x="8317948" y="1663237"/>
             <a:ext cx="1568531" cy="273065"/>
           </a:xfrm>
           <a:prstGeom prst="rect">
@@ -4050,7 +4025,37 @@
           <p:cNvPr id="10" name="Grafik 9">
             <a:extLst>
               <a:ext uri="{FF2B5EF4-FFF2-40B4-BE49-F238E27FC236}">
-                <a16:creationId xmlns:a16="http://schemas.microsoft.com/office/drawing/2014/main" id="{AB54B3DC-4AAD-25E3-5E57-CB86349EBCDC}"/>
+                <a16:creationId xmlns:a16="http://schemas.microsoft.com/office/drawing/2014/main" id="{E9A37D85-5289-5C18-F187-36464835E375}"/>
+              </a:ext>
+            </a:extLst>
+          </p:cNvPr>
+          <p:cNvPicPr>
+            <a:picLocks noChangeAspect="1"/>
+          </p:cNvPicPr>
+          <p:nvPr/>
+        </p:nvPicPr>
+        <p:blipFill>
+          <a:blip r:embed="rId5"/>
+          <a:stretch>
+            <a:fillRect/>
+          </a:stretch>
+        </p:blipFill>
+        <p:spPr>
+          <a:xfrm>
+            <a:off x="8451288" y="1933182"/>
+            <a:ext cx="1638384" cy="285765"/>
+          </a:xfrm>
+          <a:prstGeom prst="rect">
+            <a:avLst/>
+          </a:prstGeom>
+        </p:spPr>
+      </p:pic>
+      <p:pic>
+        <p:nvPicPr>
+          <p:cNvPr id="12" name="Grafik 11">
+            <a:extLst>
+              <a:ext uri="{FF2B5EF4-FFF2-40B4-BE49-F238E27FC236}">
+                <a16:creationId xmlns:a16="http://schemas.microsoft.com/office/drawing/2014/main" id="{4EE8BA87-E72F-3D7B-797A-79D77F24C24C}"/>
               </a:ext>
             </a:extLst>
           </p:cNvPr>
@@ -4067,8 +4072,8 @@
         </p:blipFill>
         <p:spPr>
           <a:xfrm>
-            <a:off x="8544052" y="2151840"/>
-            <a:ext cx="1638384" cy="285765"/>
+            <a:off x="8405935" y="2174675"/>
+            <a:ext cx="1790792" cy="279414"/>
           </a:xfrm>
           <a:prstGeom prst="rect">
             <a:avLst/>
@@ -4077,10 +4082,10 @@
       </p:pic>
       <p:pic>
         <p:nvPicPr>
-          <p:cNvPr id="12" name="Grafik 11">
-            <a:extLst>
-              <a:ext uri="{FF2B5EF4-FFF2-40B4-BE49-F238E27FC236}">
-                <a16:creationId xmlns:a16="http://schemas.microsoft.com/office/drawing/2014/main" id="{A94DA52E-FD16-A5E3-1DAF-88F2E0857877}"/>
+          <p:cNvPr id="4" name="Grafik 3">
+            <a:extLst>
+              <a:ext uri="{FF2B5EF4-FFF2-40B4-BE49-F238E27FC236}">
+                <a16:creationId xmlns:a16="http://schemas.microsoft.com/office/drawing/2014/main" id="{8360D452-C156-56EF-6B65-47D08282ED10}"/>
               </a:ext>
             </a:extLst>
           </p:cNvPr>
@@ -4097,38 +4102,8 @@
         </p:blipFill>
         <p:spPr>
           <a:xfrm>
-            <a:off x="8505325" y="2380081"/>
-            <a:ext cx="1790792" cy="279414"/>
-          </a:xfrm>
-          <a:prstGeom prst="rect">
-            <a:avLst/>
-          </a:prstGeom>
-        </p:spPr>
-      </p:pic>
-      <p:pic>
-        <p:nvPicPr>
-          <p:cNvPr id="14" name="Grafik 13">
-            <a:extLst>
-              <a:ext uri="{FF2B5EF4-FFF2-40B4-BE49-F238E27FC236}">
-                <a16:creationId xmlns:a16="http://schemas.microsoft.com/office/drawing/2014/main" id="{22D9004B-F486-76AC-8D09-D3142DFC3286}"/>
-              </a:ext>
-            </a:extLst>
-          </p:cNvPr>
-          <p:cNvPicPr>
-            <a:picLocks noChangeAspect="1"/>
-          </p:cNvPicPr>
-          <p:nvPr/>
-        </p:nvPicPr>
-        <p:blipFill>
-          <a:blip r:embed="rId8"/>
-          <a:stretch>
-            <a:fillRect/>
-          </a:stretch>
-        </p:blipFill>
-        <p:spPr>
-          <a:xfrm>
-            <a:off x="2365182" y="3530593"/>
-            <a:ext cx="1301817" cy="260363"/>
+            <a:off x="4172868" y="1232828"/>
+            <a:ext cx="4323764" cy="3935481"/>
           </a:xfrm>
           <a:prstGeom prst="rect">
             <a:avLst/>
@@ -4138,7 +4113,7 @@
     </p:spTree>
     <p:extLst>
       <p:ext uri="{BB962C8B-B14F-4D97-AF65-F5344CB8AC3E}">
-        <p14:creationId xmlns:p14="http://schemas.microsoft.com/office/powerpoint/2010/main" val="3940302557"/>
+        <p14:creationId xmlns:p14="http://schemas.microsoft.com/office/powerpoint/2010/main" val="2472032001"/>
       </p:ext>
     </p:extLst>
   </p:cSld>

--- a/docs/source/ip_cores/uz_ssi_interface/ssi_figures.pptx
+++ b/docs/source/ip_cores/uz_ssi_interface/ssi_figures.pptx
@@ -260,7 +260,7 @@
           <a:p>
             <a:fld id="{7E2356D3-E30D-44B7-AFFE-AEB9BA27F901}" type="datetimeFigureOut">
               <a:rPr lang="de-DE" smtClean="0"/>
-              <a:t>08.05.2026</a:t>
+              <a:t>11.05.2026</a:t>
             </a:fld>
             <a:endParaRPr lang="de-DE"/>
           </a:p>
@@ -458,7 +458,7 @@
           <a:p>
             <a:fld id="{7E2356D3-E30D-44B7-AFFE-AEB9BA27F901}" type="datetimeFigureOut">
               <a:rPr lang="de-DE" smtClean="0"/>
-              <a:t>08.05.2026</a:t>
+              <a:t>11.05.2026</a:t>
             </a:fld>
             <a:endParaRPr lang="de-DE"/>
           </a:p>
@@ -666,7 +666,7 @@
           <a:p>
             <a:fld id="{7E2356D3-E30D-44B7-AFFE-AEB9BA27F901}" type="datetimeFigureOut">
               <a:rPr lang="de-DE" smtClean="0"/>
-              <a:t>08.05.2026</a:t>
+              <a:t>11.05.2026</a:t>
             </a:fld>
             <a:endParaRPr lang="de-DE"/>
           </a:p>
@@ -864,7 +864,7 @@
           <a:p>
             <a:fld id="{7E2356D3-E30D-44B7-AFFE-AEB9BA27F901}" type="datetimeFigureOut">
               <a:rPr lang="de-DE" smtClean="0"/>
-              <a:t>08.05.2026</a:t>
+              <a:t>11.05.2026</a:t>
             </a:fld>
             <a:endParaRPr lang="de-DE"/>
           </a:p>
@@ -1139,7 +1139,7 @@
           <a:p>
             <a:fld id="{7E2356D3-E30D-44B7-AFFE-AEB9BA27F901}" type="datetimeFigureOut">
               <a:rPr lang="de-DE" smtClean="0"/>
-              <a:t>08.05.2026</a:t>
+              <a:t>11.05.2026</a:t>
             </a:fld>
             <a:endParaRPr lang="de-DE"/>
           </a:p>
@@ -1404,7 +1404,7 @@
           <a:p>
             <a:fld id="{7E2356D3-E30D-44B7-AFFE-AEB9BA27F901}" type="datetimeFigureOut">
               <a:rPr lang="de-DE" smtClean="0"/>
-              <a:t>08.05.2026</a:t>
+              <a:t>11.05.2026</a:t>
             </a:fld>
             <a:endParaRPr lang="de-DE"/>
           </a:p>
@@ -1816,7 +1816,7 @@
           <a:p>
             <a:fld id="{7E2356D3-E30D-44B7-AFFE-AEB9BA27F901}" type="datetimeFigureOut">
               <a:rPr lang="de-DE" smtClean="0"/>
-              <a:t>08.05.2026</a:t>
+              <a:t>11.05.2026</a:t>
             </a:fld>
             <a:endParaRPr lang="de-DE"/>
           </a:p>
@@ -1957,7 +1957,7 @@
           <a:p>
             <a:fld id="{7E2356D3-E30D-44B7-AFFE-AEB9BA27F901}" type="datetimeFigureOut">
               <a:rPr lang="de-DE" smtClean="0"/>
-              <a:t>08.05.2026</a:t>
+              <a:t>11.05.2026</a:t>
             </a:fld>
             <a:endParaRPr lang="de-DE"/>
           </a:p>
@@ -2070,7 +2070,7 @@
           <a:p>
             <a:fld id="{7E2356D3-E30D-44B7-AFFE-AEB9BA27F901}" type="datetimeFigureOut">
               <a:rPr lang="de-DE" smtClean="0"/>
-              <a:t>08.05.2026</a:t>
+              <a:t>11.05.2026</a:t>
             </a:fld>
             <a:endParaRPr lang="de-DE"/>
           </a:p>
@@ -2381,7 +2381,7 @@
           <a:p>
             <a:fld id="{7E2356D3-E30D-44B7-AFFE-AEB9BA27F901}" type="datetimeFigureOut">
               <a:rPr lang="de-DE" smtClean="0"/>
-              <a:t>08.05.2026</a:t>
+              <a:t>11.05.2026</a:t>
             </a:fld>
             <a:endParaRPr lang="de-DE"/>
           </a:p>
@@ -2669,7 +2669,7 @@
           <a:p>
             <a:fld id="{7E2356D3-E30D-44B7-AFFE-AEB9BA27F901}" type="datetimeFigureOut">
               <a:rPr lang="de-DE" smtClean="0"/>
-              <a:t>08.05.2026</a:t>
+              <a:t>11.05.2026</a:t>
             </a:fld>
             <a:endParaRPr lang="de-DE"/>
           </a:p>
@@ -2910,7 +2910,7 @@
           <a:p>
             <a:fld id="{7E2356D3-E30D-44B7-AFFE-AEB9BA27F901}" type="datetimeFigureOut">
               <a:rPr lang="de-DE" smtClean="0"/>
-              <a:t>08.05.2026</a:t>
+              <a:t>11.05.2026</a:t>
             </a:fld>
             <a:endParaRPr lang="de-DE"/>
           </a:p>
@@ -3329,10 +3329,10 @@
       </p:grpSpPr>
       <p:pic>
         <p:nvPicPr>
-          <p:cNvPr id="7" name="Grafik 6">
-            <a:extLst>
-              <a:ext uri="{FF2B5EF4-FFF2-40B4-BE49-F238E27FC236}">
-                <a16:creationId xmlns:a16="http://schemas.microsoft.com/office/drawing/2014/main" id="{273091E2-ACC0-0219-3870-97EE69DBC086}"/>
+          <p:cNvPr id="3" name="Grafik 2">
+            <a:extLst>
+              <a:ext uri="{FF2B5EF4-FFF2-40B4-BE49-F238E27FC236}">
+                <a16:creationId xmlns:a16="http://schemas.microsoft.com/office/drawing/2014/main" id="{F73F2F22-0407-7A47-DC47-265514A2287C}"/>
               </a:ext>
             </a:extLst>
           </p:cNvPr>
@@ -3349,8 +3349,8 @@
         </p:blipFill>
         <p:spPr>
           <a:xfrm>
-            <a:off x="214680" y="254000"/>
-            <a:ext cx="11697996" cy="4902200"/>
+            <a:off x="-1" y="0"/>
+            <a:ext cx="11168743" cy="5900696"/>
           </a:xfrm>
           <a:prstGeom prst="rect">
             <a:avLst/>
@@ -3359,10 +3359,10 @@
       </p:pic>
       <p:pic>
         <p:nvPicPr>
-          <p:cNvPr id="9" name="Grafik 8">
-            <a:extLst>
-              <a:ext uri="{FF2B5EF4-FFF2-40B4-BE49-F238E27FC236}">
-                <a16:creationId xmlns:a16="http://schemas.microsoft.com/office/drawing/2014/main" id="{58CC2BC6-9334-A81F-0BDE-E65EADF8E406}"/>
+          <p:cNvPr id="5" name="Grafik 4">
+            <a:extLst>
+              <a:ext uri="{FF2B5EF4-FFF2-40B4-BE49-F238E27FC236}">
+                <a16:creationId xmlns:a16="http://schemas.microsoft.com/office/drawing/2014/main" id="{9877DEA2-27A7-41F3-838B-C6134443DB4D}"/>
               </a:ext>
             </a:extLst>
           </p:cNvPr>
@@ -3379,8 +3379,8 @@
         </p:blipFill>
         <p:spPr>
           <a:xfrm>
-            <a:off x="50800" y="2819317"/>
-            <a:ext cx="6570586" cy="3987883"/>
+            <a:off x="63275" y="2856619"/>
+            <a:ext cx="6760026" cy="3652934"/>
           </a:xfrm>
           <a:prstGeom prst="rect">
             <a:avLst/>
@@ -3406,7 +3406,7 @@
         </p:nvSpPr>
         <p:spPr>
           <a:xfrm>
-            <a:off x="6248400" y="495300"/>
+            <a:off x="5664200" y="0"/>
             <a:ext cx="1308100" cy="2171700"/>
           </a:xfrm>
           <a:prstGeom prst="rect">
@@ -3458,7 +3458,7 @@
         </p:nvSpPr>
         <p:spPr>
           <a:xfrm>
-            <a:off x="109538" y="3362325"/>
+            <a:off x="63275" y="3371850"/>
             <a:ext cx="766762" cy="369332"/>
           </a:xfrm>
           <a:prstGeom prst="rect">
@@ -3497,7 +3497,7 @@
         </p:nvSpPr>
         <p:spPr>
           <a:xfrm>
-            <a:off x="109537" y="4129088"/>
+            <a:off x="43289" y="3860944"/>
             <a:ext cx="1042987" cy="369332"/>
           </a:xfrm>
           <a:prstGeom prst="rect">
@@ -3541,7 +3541,7 @@
         </p:nvSpPr>
         <p:spPr>
           <a:xfrm>
-            <a:off x="109536" y="4313754"/>
+            <a:off x="42575" y="4127010"/>
             <a:ext cx="2352677" cy="369332"/>
           </a:xfrm>
           <a:prstGeom prst="rect">
@@ -3627,7 +3627,7 @@
         </p:nvCxnSpPr>
         <p:spPr>
           <a:xfrm flipV="1">
-            <a:off x="2995613" y="3546991"/>
+            <a:off x="3186622" y="3550682"/>
             <a:ext cx="571500" cy="381000"/>
           </a:xfrm>
           <a:prstGeom prst="straightConnector1">
@@ -3669,7 +3669,7 @@
         </p:nvCxnSpPr>
         <p:spPr>
           <a:xfrm flipV="1">
-            <a:off x="2871788" y="4307920"/>
+            <a:off x="2900872" y="4096141"/>
             <a:ext cx="571500" cy="381000"/>
           </a:xfrm>
           <a:prstGeom prst="straightConnector1">
@@ -3771,7 +3771,7 @@
         </p:nvSpPr>
         <p:spPr>
           <a:xfrm>
-            <a:off x="2015726" y="4655665"/>
+            <a:off x="1804704" y="4468193"/>
             <a:ext cx="1469231" cy="369332"/>
           </a:xfrm>
           <a:prstGeom prst="rect">
@@ -3786,7 +3786,7 @@
           <a:lstStyle/>
           <a:p>
             <a:r>
-              <a:rPr lang="de-DE">
+              <a:rPr lang="de-DE" dirty="0" err="1">
                 <a:solidFill>
                   <a:schemeClr val="bg1"/>
                 </a:solidFill>
@@ -3831,7 +3831,7 @@
         </p:nvSpPr>
         <p:spPr>
           <a:xfrm>
-            <a:off x="3513610" y="3188341"/>
+            <a:off x="3735860" y="3371850"/>
             <a:ext cx="2582390" cy="369332"/>
           </a:xfrm>
           <a:prstGeom prst="rect">
